--- a/Final/Figures/SAM_OAM.pptx
+++ b/Final/Figures/SAM_OAM.pptx
@@ -2,12 +2,12 @@
 <file path=ppt/presentation.xml><?xml version="1.0" encoding="utf-8"?>
 <p:presentation xmlns:a="http://schemas.openxmlformats.org/drawingml/2006/main" xmlns:r="http://schemas.openxmlformats.org/officeDocument/2006/relationships" xmlns:p="http://schemas.openxmlformats.org/presentationml/2006/main" saveSubsetFonts="1">
   <p:sldMasterIdLst>
-    <p:sldMasterId id="2147483672" r:id="rId1"/>
+    <p:sldMasterId id="2147483696" r:id="rId1"/>
   </p:sldMasterIdLst>
   <p:sldIdLst>
     <p:sldId id="256" r:id="rId2"/>
   </p:sldIdLst>
-  <p:sldSz cx="12192000" cy="4319588"/>
+  <p:sldSz cx="12192000" cy="3600450"/>
   <p:notesSz cx="6858000" cy="9144000"/>
   <p:defaultTextStyle>
     <a:defPPr>
@@ -141,15 +141,15 @@
         </p:nvSpPr>
         <p:spPr>
           <a:xfrm>
-            <a:off x="1524000" y="706933"/>
-            <a:ext cx="9144000" cy="1503857"/>
+            <a:off x="1524000" y="589241"/>
+            <a:ext cx="9144000" cy="1253490"/>
           </a:xfrm>
         </p:spPr>
         <p:txBody>
           <a:bodyPr anchor="b"/>
           <a:lstStyle>
             <a:lvl1pPr algn="ctr">
-              <a:defRPr sz="3779"/>
+              <a:defRPr sz="3150"/>
             </a:lvl1pPr>
           </a:lstStyle>
           <a:p>
@@ -173,8 +173,8 @@
         </p:nvSpPr>
         <p:spPr>
           <a:xfrm>
-            <a:off x="1524000" y="2268784"/>
-            <a:ext cx="9144000" cy="1042900"/>
+            <a:off x="1524000" y="1891070"/>
+            <a:ext cx="9144000" cy="869275"/>
           </a:xfrm>
         </p:spPr>
         <p:txBody>
@@ -182,39 +182,39 @@
           <a:lstStyle>
             <a:lvl1pPr marL="0" indent="0" algn="ctr">
               <a:buNone/>
-              <a:defRPr sz="1512"/>
+              <a:defRPr sz="1260"/>
             </a:lvl1pPr>
-            <a:lvl2pPr marL="287990" indent="0" algn="ctr">
-              <a:buNone/>
-              <a:defRPr sz="1260"/>
+            <a:lvl2pPr marL="240030" indent="0" algn="ctr">
+              <a:buNone/>
+              <a:defRPr sz="1050"/>
             </a:lvl2pPr>
-            <a:lvl3pPr marL="575981" indent="0" algn="ctr">
-              <a:buNone/>
-              <a:defRPr sz="1134"/>
+            <a:lvl3pPr marL="480060" indent="0" algn="ctr">
+              <a:buNone/>
+              <a:defRPr sz="945"/>
             </a:lvl3pPr>
-            <a:lvl4pPr marL="863971" indent="0" algn="ctr">
-              <a:buNone/>
-              <a:defRPr sz="1008"/>
+            <a:lvl4pPr marL="720090" indent="0" algn="ctr">
+              <a:buNone/>
+              <a:defRPr sz="840"/>
             </a:lvl4pPr>
-            <a:lvl5pPr marL="1151961" indent="0" algn="ctr">
-              <a:buNone/>
-              <a:defRPr sz="1008"/>
+            <a:lvl5pPr marL="960120" indent="0" algn="ctr">
+              <a:buNone/>
+              <a:defRPr sz="840"/>
             </a:lvl5pPr>
-            <a:lvl6pPr marL="1439951" indent="0" algn="ctr">
-              <a:buNone/>
-              <a:defRPr sz="1008"/>
+            <a:lvl6pPr marL="1200150" indent="0" algn="ctr">
+              <a:buNone/>
+              <a:defRPr sz="840"/>
             </a:lvl6pPr>
-            <a:lvl7pPr marL="1727942" indent="0" algn="ctr">
-              <a:buNone/>
-              <a:defRPr sz="1008"/>
+            <a:lvl7pPr marL="1440180" indent="0" algn="ctr">
+              <a:buNone/>
+              <a:defRPr sz="840"/>
             </a:lvl7pPr>
-            <a:lvl8pPr marL="2015932" indent="0" algn="ctr">
-              <a:buNone/>
-              <a:defRPr sz="1008"/>
+            <a:lvl8pPr marL="1680210" indent="0" algn="ctr">
+              <a:buNone/>
+              <a:defRPr sz="840"/>
             </a:lvl8pPr>
-            <a:lvl9pPr marL="2303922" indent="0" algn="ctr">
-              <a:buNone/>
-              <a:defRPr sz="1008"/>
+            <a:lvl9pPr marL="1920240" indent="0" algn="ctr">
+              <a:buNone/>
+              <a:defRPr sz="840"/>
             </a:lvl9pPr>
           </a:lstStyle>
           <a:p>
@@ -243,7 +243,7 @@
           <a:p>
             <a:fld id="{BBBC932A-8CEB-449A-B6E3-A107DE752909}" type="datetimeFigureOut">
               <a:rPr lang="zh-TW" altLang="en-US" smtClean="0"/>
-              <a:t>2026/3/19</a:t>
+              <a:t>2026/4/20</a:t>
             </a:fld>
             <a:endParaRPr lang="zh-TW" altLang="en-US"/>
           </a:p>
@@ -294,7 +294,7 @@
     </p:spTree>
     <p:extLst>
       <p:ext uri="{BB962C8B-B14F-4D97-AF65-F5344CB8AC3E}">
-        <p14:creationId xmlns:p14="http://schemas.microsoft.com/office/powerpoint/2010/main" val="3945328440"/>
+        <p14:creationId xmlns:p14="http://schemas.microsoft.com/office/powerpoint/2010/main" val="2439795954"/>
       </p:ext>
     </p:extLst>
   </p:cSld>
@@ -413,7 +413,7 @@
           <a:p>
             <a:fld id="{BBBC932A-8CEB-449A-B6E3-A107DE752909}" type="datetimeFigureOut">
               <a:rPr lang="zh-TW" altLang="en-US" smtClean="0"/>
-              <a:t>2026/3/19</a:t>
+              <a:t>2026/4/20</a:t>
             </a:fld>
             <a:endParaRPr lang="zh-TW" altLang="en-US"/>
           </a:p>
@@ -464,7 +464,7 @@
     </p:spTree>
     <p:extLst>
       <p:ext uri="{BB962C8B-B14F-4D97-AF65-F5344CB8AC3E}">
-        <p14:creationId xmlns:p14="http://schemas.microsoft.com/office/powerpoint/2010/main" val="1210511244"/>
+        <p14:creationId xmlns:p14="http://schemas.microsoft.com/office/powerpoint/2010/main" val="3013329734"/>
       </p:ext>
     </p:extLst>
   </p:cSld>
@@ -503,8 +503,8 @@
         </p:nvSpPr>
         <p:spPr>
           <a:xfrm>
-            <a:off x="8724900" y="229978"/>
-            <a:ext cx="2628900" cy="3660651"/>
+            <a:off x="8724900" y="191691"/>
+            <a:ext cx="2628900" cy="3051215"/>
           </a:xfrm>
         </p:spPr>
         <p:txBody>
@@ -531,8 +531,8 @@
         </p:nvSpPr>
         <p:spPr>
           <a:xfrm>
-            <a:off x="838200" y="229978"/>
-            <a:ext cx="7734300" cy="3660651"/>
+            <a:off x="838200" y="191691"/>
+            <a:ext cx="7734300" cy="3051215"/>
           </a:xfrm>
         </p:spPr>
         <p:txBody>
@@ -593,7 +593,7 @@
           <a:p>
             <a:fld id="{BBBC932A-8CEB-449A-B6E3-A107DE752909}" type="datetimeFigureOut">
               <a:rPr lang="zh-TW" altLang="en-US" smtClean="0"/>
-              <a:t>2026/3/19</a:t>
+              <a:t>2026/4/20</a:t>
             </a:fld>
             <a:endParaRPr lang="zh-TW" altLang="en-US"/>
           </a:p>
@@ -644,7 +644,7 @@
     </p:spTree>
     <p:extLst>
       <p:ext uri="{BB962C8B-B14F-4D97-AF65-F5344CB8AC3E}">
-        <p14:creationId xmlns:p14="http://schemas.microsoft.com/office/powerpoint/2010/main" val="2724556612"/>
+        <p14:creationId xmlns:p14="http://schemas.microsoft.com/office/powerpoint/2010/main" val="4039544151"/>
       </p:ext>
     </p:extLst>
   </p:cSld>
@@ -763,7 +763,7 @@
           <a:p>
             <a:fld id="{BBBC932A-8CEB-449A-B6E3-A107DE752909}" type="datetimeFigureOut">
               <a:rPr lang="zh-TW" altLang="en-US" smtClean="0"/>
-              <a:t>2026/3/19</a:t>
+              <a:t>2026/4/20</a:t>
             </a:fld>
             <a:endParaRPr lang="zh-TW" altLang="en-US"/>
           </a:p>
@@ -814,7 +814,7 @@
     </p:spTree>
     <p:extLst>
       <p:ext uri="{BB962C8B-B14F-4D97-AF65-F5344CB8AC3E}">
-        <p14:creationId xmlns:p14="http://schemas.microsoft.com/office/powerpoint/2010/main" val="4045092059"/>
+        <p14:creationId xmlns:p14="http://schemas.microsoft.com/office/powerpoint/2010/main" val="3594367061"/>
       </p:ext>
     </p:extLst>
   </p:cSld>
@@ -853,15 +853,15 @@
         </p:nvSpPr>
         <p:spPr>
           <a:xfrm>
-            <a:off x="831850" y="1076898"/>
-            <a:ext cx="10515600" cy="1796828"/>
+            <a:off x="831850" y="897613"/>
+            <a:ext cx="10515600" cy="1497687"/>
           </a:xfrm>
         </p:spPr>
         <p:txBody>
           <a:bodyPr anchor="b"/>
           <a:lstStyle>
             <a:lvl1pPr>
-              <a:defRPr sz="3779"/>
+              <a:defRPr sz="3150"/>
             </a:lvl1pPr>
           </a:lstStyle>
           <a:p>
@@ -885,8 +885,8 @@
         </p:nvSpPr>
         <p:spPr>
           <a:xfrm>
-            <a:off x="831850" y="2890725"/>
-            <a:ext cx="10515600" cy="944910"/>
+            <a:off x="831850" y="2409468"/>
+            <a:ext cx="10515600" cy="787598"/>
           </a:xfrm>
         </p:spPr>
         <p:txBody>
@@ -894,7 +894,7 @@
           <a:lstStyle>
             <a:lvl1pPr marL="0" indent="0">
               <a:buNone/>
-              <a:defRPr sz="1512">
+              <a:defRPr sz="1260">
                 <a:solidFill>
                   <a:schemeClr val="tx1">
                     <a:tint val="75000"/>
@@ -902,9 +902,9 @@
                 </a:solidFill>
               </a:defRPr>
             </a:lvl1pPr>
-            <a:lvl2pPr marL="287990" indent="0">
-              <a:buNone/>
-              <a:defRPr sz="1260">
+            <a:lvl2pPr marL="240030" indent="0">
+              <a:buNone/>
+              <a:defRPr sz="1050">
                 <a:solidFill>
                   <a:schemeClr val="tx1">
                     <a:tint val="75000"/>
@@ -912,9 +912,9 @@
                 </a:solidFill>
               </a:defRPr>
             </a:lvl2pPr>
-            <a:lvl3pPr marL="575981" indent="0">
-              <a:buNone/>
-              <a:defRPr sz="1134">
+            <a:lvl3pPr marL="480060" indent="0">
+              <a:buNone/>
+              <a:defRPr sz="945">
                 <a:solidFill>
                   <a:schemeClr val="tx1">
                     <a:tint val="75000"/>
@@ -922,9 +922,9 @@
                 </a:solidFill>
               </a:defRPr>
             </a:lvl3pPr>
-            <a:lvl4pPr marL="863971" indent="0">
-              <a:buNone/>
-              <a:defRPr sz="1008">
+            <a:lvl4pPr marL="720090" indent="0">
+              <a:buNone/>
+              <a:defRPr sz="840">
                 <a:solidFill>
                   <a:schemeClr val="tx1">
                     <a:tint val="75000"/>
@@ -932,9 +932,9 @@
                 </a:solidFill>
               </a:defRPr>
             </a:lvl4pPr>
-            <a:lvl5pPr marL="1151961" indent="0">
-              <a:buNone/>
-              <a:defRPr sz="1008">
+            <a:lvl5pPr marL="960120" indent="0">
+              <a:buNone/>
+              <a:defRPr sz="840">
                 <a:solidFill>
                   <a:schemeClr val="tx1">
                     <a:tint val="75000"/>
@@ -942,9 +942,9 @@
                 </a:solidFill>
               </a:defRPr>
             </a:lvl5pPr>
-            <a:lvl6pPr marL="1439951" indent="0">
-              <a:buNone/>
-              <a:defRPr sz="1008">
+            <a:lvl6pPr marL="1200150" indent="0">
+              <a:buNone/>
+              <a:defRPr sz="840">
                 <a:solidFill>
                   <a:schemeClr val="tx1">
                     <a:tint val="75000"/>
@@ -952,9 +952,9 @@
                 </a:solidFill>
               </a:defRPr>
             </a:lvl6pPr>
-            <a:lvl7pPr marL="1727942" indent="0">
-              <a:buNone/>
-              <a:defRPr sz="1008">
+            <a:lvl7pPr marL="1440180" indent="0">
+              <a:buNone/>
+              <a:defRPr sz="840">
                 <a:solidFill>
                   <a:schemeClr val="tx1">
                     <a:tint val="75000"/>
@@ -962,9 +962,9 @@
                 </a:solidFill>
               </a:defRPr>
             </a:lvl7pPr>
-            <a:lvl8pPr marL="2015932" indent="0">
-              <a:buNone/>
-              <a:defRPr sz="1008">
+            <a:lvl8pPr marL="1680210" indent="0">
+              <a:buNone/>
+              <a:defRPr sz="840">
                 <a:solidFill>
                   <a:schemeClr val="tx1">
                     <a:tint val="75000"/>
@@ -972,9 +972,9 @@
                 </a:solidFill>
               </a:defRPr>
             </a:lvl8pPr>
-            <a:lvl9pPr marL="2303922" indent="0">
-              <a:buNone/>
-              <a:defRPr sz="1008">
+            <a:lvl9pPr marL="1920240" indent="0">
+              <a:buNone/>
+              <a:defRPr sz="840">
                 <a:solidFill>
                   <a:schemeClr val="tx1">
                     <a:tint val="75000"/>
@@ -1009,7 +1009,7 @@
           <a:p>
             <a:fld id="{BBBC932A-8CEB-449A-B6E3-A107DE752909}" type="datetimeFigureOut">
               <a:rPr lang="zh-TW" altLang="en-US" smtClean="0"/>
-              <a:t>2026/3/19</a:t>
+              <a:t>2026/4/20</a:t>
             </a:fld>
             <a:endParaRPr lang="zh-TW" altLang="en-US"/>
           </a:p>
@@ -1060,7 +1060,7 @@
     </p:spTree>
     <p:extLst>
       <p:ext uri="{BB962C8B-B14F-4D97-AF65-F5344CB8AC3E}">
-        <p14:creationId xmlns:p14="http://schemas.microsoft.com/office/powerpoint/2010/main" val="2170681680"/>
+        <p14:creationId xmlns:p14="http://schemas.microsoft.com/office/powerpoint/2010/main" val="4026299406"/>
       </p:ext>
     </p:extLst>
   </p:cSld>
@@ -1122,8 +1122,8 @@
         </p:nvSpPr>
         <p:spPr>
           <a:xfrm>
-            <a:off x="838200" y="1149890"/>
-            <a:ext cx="5181600" cy="2740739"/>
+            <a:off x="838200" y="958453"/>
+            <a:ext cx="5181600" cy="2284452"/>
           </a:xfrm>
         </p:spPr>
         <p:txBody>
@@ -1179,8 +1179,8 @@
         </p:nvSpPr>
         <p:spPr>
           <a:xfrm>
-            <a:off x="6172200" y="1149890"/>
-            <a:ext cx="5181600" cy="2740739"/>
+            <a:off x="6172200" y="958453"/>
+            <a:ext cx="5181600" cy="2284452"/>
           </a:xfrm>
         </p:spPr>
         <p:txBody>
@@ -1241,7 +1241,7 @@
           <a:p>
             <a:fld id="{BBBC932A-8CEB-449A-B6E3-A107DE752909}" type="datetimeFigureOut">
               <a:rPr lang="zh-TW" altLang="en-US" smtClean="0"/>
-              <a:t>2026/3/19</a:t>
+              <a:t>2026/4/20</a:t>
             </a:fld>
             <a:endParaRPr lang="zh-TW" altLang="en-US"/>
           </a:p>
@@ -1292,7 +1292,7 @@
     </p:spTree>
     <p:extLst>
       <p:ext uri="{BB962C8B-B14F-4D97-AF65-F5344CB8AC3E}">
-        <p14:creationId xmlns:p14="http://schemas.microsoft.com/office/powerpoint/2010/main" val="1091553453"/>
+        <p14:creationId xmlns:p14="http://schemas.microsoft.com/office/powerpoint/2010/main" val="1286752436"/>
       </p:ext>
     </p:extLst>
   </p:cSld>
@@ -1331,8 +1331,8 @@
         </p:nvSpPr>
         <p:spPr>
           <a:xfrm>
-            <a:off x="839788" y="229978"/>
-            <a:ext cx="10515600" cy="834921"/>
+            <a:off x="839788" y="191691"/>
+            <a:ext cx="10515600" cy="695921"/>
           </a:xfrm>
         </p:spPr>
         <p:txBody>
@@ -1359,8 +1359,8 @@
         </p:nvSpPr>
         <p:spPr>
           <a:xfrm>
-            <a:off x="839789" y="1058899"/>
-            <a:ext cx="5157787" cy="518950"/>
+            <a:off x="839789" y="882610"/>
+            <a:ext cx="5157787" cy="432554"/>
           </a:xfrm>
         </p:spPr>
         <p:txBody>
@@ -1368,39 +1368,39 @@
           <a:lstStyle>
             <a:lvl1pPr marL="0" indent="0">
               <a:buNone/>
-              <a:defRPr sz="1512" b="1"/>
+              <a:defRPr sz="1260" b="1"/>
             </a:lvl1pPr>
-            <a:lvl2pPr marL="287990" indent="0">
-              <a:buNone/>
-              <a:defRPr sz="1260" b="1"/>
+            <a:lvl2pPr marL="240030" indent="0">
+              <a:buNone/>
+              <a:defRPr sz="1050" b="1"/>
             </a:lvl2pPr>
-            <a:lvl3pPr marL="575981" indent="0">
-              <a:buNone/>
-              <a:defRPr sz="1134" b="1"/>
+            <a:lvl3pPr marL="480060" indent="0">
+              <a:buNone/>
+              <a:defRPr sz="945" b="1"/>
             </a:lvl3pPr>
-            <a:lvl4pPr marL="863971" indent="0">
-              <a:buNone/>
-              <a:defRPr sz="1008" b="1"/>
+            <a:lvl4pPr marL="720090" indent="0">
+              <a:buNone/>
+              <a:defRPr sz="840" b="1"/>
             </a:lvl4pPr>
-            <a:lvl5pPr marL="1151961" indent="0">
-              <a:buNone/>
-              <a:defRPr sz="1008" b="1"/>
+            <a:lvl5pPr marL="960120" indent="0">
+              <a:buNone/>
+              <a:defRPr sz="840" b="1"/>
             </a:lvl5pPr>
-            <a:lvl6pPr marL="1439951" indent="0">
-              <a:buNone/>
-              <a:defRPr sz="1008" b="1"/>
+            <a:lvl6pPr marL="1200150" indent="0">
+              <a:buNone/>
+              <a:defRPr sz="840" b="1"/>
             </a:lvl6pPr>
-            <a:lvl7pPr marL="1727942" indent="0">
-              <a:buNone/>
-              <a:defRPr sz="1008" b="1"/>
+            <a:lvl7pPr marL="1440180" indent="0">
+              <a:buNone/>
+              <a:defRPr sz="840" b="1"/>
             </a:lvl7pPr>
-            <a:lvl8pPr marL="2015932" indent="0">
-              <a:buNone/>
-              <a:defRPr sz="1008" b="1"/>
+            <a:lvl8pPr marL="1680210" indent="0">
+              <a:buNone/>
+              <a:defRPr sz="840" b="1"/>
             </a:lvl8pPr>
-            <a:lvl9pPr marL="2303922" indent="0">
-              <a:buNone/>
-              <a:defRPr sz="1008" b="1"/>
+            <a:lvl9pPr marL="1920240" indent="0">
+              <a:buNone/>
+              <a:defRPr sz="840" b="1"/>
             </a:lvl9pPr>
           </a:lstStyle>
           <a:p>
@@ -1424,8 +1424,8 @@
         </p:nvSpPr>
         <p:spPr>
           <a:xfrm>
-            <a:off x="839789" y="1577849"/>
-            <a:ext cx="5157787" cy="2320779"/>
+            <a:off x="839789" y="1315164"/>
+            <a:ext cx="5157787" cy="1934409"/>
           </a:xfrm>
         </p:spPr>
         <p:txBody>
@@ -1481,8 +1481,8 @@
         </p:nvSpPr>
         <p:spPr>
           <a:xfrm>
-            <a:off x="6172200" y="1058899"/>
-            <a:ext cx="5183188" cy="518950"/>
+            <a:off x="6172200" y="882610"/>
+            <a:ext cx="5183188" cy="432554"/>
           </a:xfrm>
         </p:spPr>
         <p:txBody>
@@ -1490,39 +1490,39 @@
           <a:lstStyle>
             <a:lvl1pPr marL="0" indent="0">
               <a:buNone/>
-              <a:defRPr sz="1512" b="1"/>
+              <a:defRPr sz="1260" b="1"/>
             </a:lvl1pPr>
-            <a:lvl2pPr marL="287990" indent="0">
-              <a:buNone/>
-              <a:defRPr sz="1260" b="1"/>
+            <a:lvl2pPr marL="240030" indent="0">
+              <a:buNone/>
+              <a:defRPr sz="1050" b="1"/>
             </a:lvl2pPr>
-            <a:lvl3pPr marL="575981" indent="0">
-              <a:buNone/>
-              <a:defRPr sz="1134" b="1"/>
+            <a:lvl3pPr marL="480060" indent="0">
+              <a:buNone/>
+              <a:defRPr sz="945" b="1"/>
             </a:lvl3pPr>
-            <a:lvl4pPr marL="863971" indent="0">
-              <a:buNone/>
-              <a:defRPr sz="1008" b="1"/>
+            <a:lvl4pPr marL="720090" indent="0">
+              <a:buNone/>
+              <a:defRPr sz="840" b="1"/>
             </a:lvl4pPr>
-            <a:lvl5pPr marL="1151961" indent="0">
-              <a:buNone/>
-              <a:defRPr sz="1008" b="1"/>
+            <a:lvl5pPr marL="960120" indent="0">
+              <a:buNone/>
+              <a:defRPr sz="840" b="1"/>
             </a:lvl5pPr>
-            <a:lvl6pPr marL="1439951" indent="0">
-              <a:buNone/>
-              <a:defRPr sz="1008" b="1"/>
+            <a:lvl6pPr marL="1200150" indent="0">
+              <a:buNone/>
+              <a:defRPr sz="840" b="1"/>
             </a:lvl6pPr>
-            <a:lvl7pPr marL="1727942" indent="0">
-              <a:buNone/>
-              <a:defRPr sz="1008" b="1"/>
+            <a:lvl7pPr marL="1440180" indent="0">
+              <a:buNone/>
+              <a:defRPr sz="840" b="1"/>
             </a:lvl7pPr>
-            <a:lvl8pPr marL="2015932" indent="0">
-              <a:buNone/>
-              <a:defRPr sz="1008" b="1"/>
+            <a:lvl8pPr marL="1680210" indent="0">
+              <a:buNone/>
+              <a:defRPr sz="840" b="1"/>
             </a:lvl8pPr>
-            <a:lvl9pPr marL="2303922" indent="0">
-              <a:buNone/>
-              <a:defRPr sz="1008" b="1"/>
+            <a:lvl9pPr marL="1920240" indent="0">
+              <a:buNone/>
+              <a:defRPr sz="840" b="1"/>
             </a:lvl9pPr>
           </a:lstStyle>
           <a:p>
@@ -1546,8 +1546,8 @@
         </p:nvSpPr>
         <p:spPr>
           <a:xfrm>
-            <a:off x="6172200" y="1577849"/>
-            <a:ext cx="5183188" cy="2320779"/>
+            <a:off x="6172200" y="1315164"/>
+            <a:ext cx="5183188" cy="1934409"/>
           </a:xfrm>
         </p:spPr>
         <p:txBody>
@@ -1608,7 +1608,7 @@
           <a:p>
             <a:fld id="{BBBC932A-8CEB-449A-B6E3-A107DE752909}" type="datetimeFigureOut">
               <a:rPr lang="zh-TW" altLang="en-US" smtClean="0"/>
-              <a:t>2026/3/19</a:t>
+              <a:t>2026/4/20</a:t>
             </a:fld>
             <a:endParaRPr lang="zh-TW" altLang="en-US"/>
           </a:p>
@@ -1659,7 +1659,7 @@
     </p:spTree>
     <p:extLst>
       <p:ext uri="{BB962C8B-B14F-4D97-AF65-F5344CB8AC3E}">
-        <p14:creationId xmlns:p14="http://schemas.microsoft.com/office/powerpoint/2010/main" val="4056531406"/>
+        <p14:creationId xmlns:p14="http://schemas.microsoft.com/office/powerpoint/2010/main" val="1810376659"/>
       </p:ext>
     </p:extLst>
   </p:cSld>
@@ -1726,7 +1726,7 @@
           <a:p>
             <a:fld id="{BBBC932A-8CEB-449A-B6E3-A107DE752909}" type="datetimeFigureOut">
               <a:rPr lang="zh-TW" altLang="en-US" smtClean="0"/>
-              <a:t>2026/3/19</a:t>
+              <a:t>2026/4/20</a:t>
             </a:fld>
             <a:endParaRPr lang="zh-TW" altLang="en-US"/>
           </a:p>
@@ -1777,7 +1777,7 @@
     </p:spTree>
     <p:extLst>
       <p:ext uri="{BB962C8B-B14F-4D97-AF65-F5344CB8AC3E}">
-        <p14:creationId xmlns:p14="http://schemas.microsoft.com/office/powerpoint/2010/main" val="2102264385"/>
+        <p14:creationId xmlns:p14="http://schemas.microsoft.com/office/powerpoint/2010/main" val="3280162374"/>
       </p:ext>
     </p:extLst>
   </p:cSld>
@@ -1821,7 +1821,7 @@
           <a:p>
             <a:fld id="{BBBC932A-8CEB-449A-B6E3-A107DE752909}" type="datetimeFigureOut">
               <a:rPr lang="zh-TW" altLang="en-US" smtClean="0"/>
-              <a:t>2026/3/19</a:t>
+              <a:t>2026/4/20</a:t>
             </a:fld>
             <a:endParaRPr lang="zh-TW" altLang="en-US"/>
           </a:p>
@@ -1872,7 +1872,7 @@
     </p:spTree>
     <p:extLst>
       <p:ext uri="{BB962C8B-B14F-4D97-AF65-F5344CB8AC3E}">
-        <p14:creationId xmlns:p14="http://schemas.microsoft.com/office/powerpoint/2010/main" val="1081024537"/>
+        <p14:creationId xmlns:p14="http://schemas.microsoft.com/office/powerpoint/2010/main" val="946813772"/>
       </p:ext>
     </p:extLst>
   </p:cSld>
@@ -1911,15 +1911,15 @@
         </p:nvSpPr>
         <p:spPr>
           <a:xfrm>
-            <a:off x="839789" y="287972"/>
-            <a:ext cx="3932237" cy="1007904"/>
+            <a:off x="839789" y="240030"/>
+            <a:ext cx="3932237" cy="840105"/>
           </a:xfrm>
         </p:spPr>
         <p:txBody>
           <a:bodyPr anchor="b"/>
           <a:lstStyle>
             <a:lvl1pPr>
-              <a:defRPr sz="2016"/>
+              <a:defRPr sz="1680"/>
             </a:lvl1pPr>
           </a:lstStyle>
           <a:p>
@@ -1943,39 +1943,39 @@
         </p:nvSpPr>
         <p:spPr>
           <a:xfrm>
-            <a:off x="5183188" y="621941"/>
-            <a:ext cx="6172200" cy="3069707"/>
+            <a:off x="5183188" y="518398"/>
+            <a:ext cx="6172200" cy="2558653"/>
           </a:xfrm>
         </p:spPr>
         <p:txBody>
           <a:bodyPr/>
           <a:lstStyle>
             <a:lvl1pPr>
-              <a:defRPr sz="2016"/>
+              <a:defRPr sz="1680"/>
             </a:lvl1pPr>
             <a:lvl2pPr>
-              <a:defRPr sz="1764"/>
+              <a:defRPr sz="1470"/>
             </a:lvl2pPr>
             <a:lvl3pPr>
-              <a:defRPr sz="1512"/>
+              <a:defRPr sz="1260"/>
             </a:lvl3pPr>
             <a:lvl4pPr>
-              <a:defRPr sz="1260"/>
+              <a:defRPr sz="1050"/>
             </a:lvl4pPr>
             <a:lvl5pPr>
-              <a:defRPr sz="1260"/>
+              <a:defRPr sz="1050"/>
             </a:lvl5pPr>
             <a:lvl6pPr>
-              <a:defRPr sz="1260"/>
+              <a:defRPr sz="1050"/>
             </a:lvl6pPr>
             <a:lvl7pPr>
-              <a:defRPr sz="1260"/>
+              <a:defRPr sz="1050"/>
             </a:lvl7pPr>
             <a:lvl8pPr>
-              <a:defRPr sz="1260"/>
+              <a:defRPr sz="1050"/>
             </a:lvl8pPr>
             <a:lvl9pPr>
-              <a:defRPr sz="1260"/>
+              <a:defRPr sz="1050"/>
             </a:lvl9pPr>
           </a:lstStyle>
           <a:p>
@@ -2028,8 +2028,8 @@
         </p:nvSpPr>
         <p:spPr>
           <a:xfrm>
-            <a:off x="839789" y="1295877"/>
-            <a:ext cx="3932237" cy="2400771"/>
+            <a:off x="839789" y="1080135"/>
+            <a:ext cx="3932237" cy="2001084"/>
           </a:xfrm>
         </p:spPr>
         <p:txBody>
@@ -2037,39 +2037,39 @@
           <a:lstStyle>
             <a:lvl1pPr marL="0" indent="0">
               <a:buNone/>
-              <a:defRPr sz="1008"/>
+              <a:defRPr sz="840"/>
             </a:lvl1pPr>
-            <a:lvl2pPr marL="287990" indent="0">
-              <a:buNone/>
-              <a:defRPr sz="882"/>
+            <a:lvl2pPr marL="240030" indent="0">
+              <a:buNone/>
+              <a:defRPr sz="735"/>
             </a:lvl2pPr>
-            <a:lvl3pPr marL="575981" indent="0">
-              <a:buNone/>
-              <a:defRPr sz="756"/>
+            <a:lvl3pPr marL="480060" indent="0">
+              <a:buNone/>
+              <a:defRPr sz="630"/>
             </a:lvl3pPr>
-            <a:lvl4pPr marL="863971" indent="0">
-              <a:buNone/>
-              <a:defRPr sz="630"/>
+            <a:lvl4pPr marL="720090" indent="0">
+              <a:buNone/>
+              <a:defRPr sz="525"/>
             </a:lvl4pPr>
-            <a:lvl5pPr marL="1151961" indent="0">
-              <a:buNone/>
-              <a:defRPr sz="630"/>
+            <a:lvl5pPr marL="960120" indent="0">
+              <a:buNone/>
+              <a:defRPr sz="525"/>
             </a:lvl5pPr>
-            <a:lvl6pPr marL="1439951" indent="0">
-              <a:buNone/>
-              <a:defRPr sz="630"/>
+            <a:lvl6pPr marL="1200150" indent="0">
+              <a:buNone/>
+              <a:defRPr sz="525"/>
             </a:lvl6pPr>
-            <a:lvl7pPr marL="1727942" indent="0">
-              <a:buNone/>
-              <a:defRPr sz="630"/>
+            <a:lvl7pPr marL="1440180" indent="0">
+              <a:buNone/>
+              <a:defRPr sz="525"/>
             </a:lvl7pPr>
-            <a:lvl8pPr marL="2015932" indent="0">
-              <a:buNone/>
-              <a:defRPr sz="630"/>
+            <a:lvl8pPr marL="1680210" indent="0">
+              <a:buNone/>
+              <a:defRPr sz="525"/>
             </a:lvl8pPr>
-            <a:lvl9pPr marL="2303922" indent="0">
-              <a:buNone/>
-              <a:defRPr sz="630"/>
+            <a:lvl9pPr marL="1920240" indent="0">
+              <a:buNone/>
+              <a:defRPr sz="525"/>
             </a:lvl9pPr>
           </a:lstStyle>
           <a:p>
@@ -2098,7 +2098,7 @@
           <a:p>
             <a:fld id="{BBBC932A-8CEB-449A-B6E3-A107DE752909}" type="datetimeFigureOut">
               <a:rPr lang="zh-TW" altLang="en-US" smtClean="0"/>
-              <a:t>2026/3/19</a:t>
+              <a:t>2026/4/20</a:t>
             </a:fld>
             <a:endParaRPr lang="zh-TW" altLang="en-US"/>
           </a:p>
@@ -2149,7 +2149,7 @@
     </p:spTree>
     <p:extLst>
       <p:ext uri="{BB962C8B-B14F-4D97-AF65-F5344CB8AC3E}">
-        <p14:creationId xmlns:p14="http://schemas.microsoft.com/office/powerpoint/2010/main" val="1215597726"/>
+        <p14:creationId xmlns:p14="http://schemas.microsoft.com/office/powerpoint/2010/main" val="2583861645"/>
       </p:ext>
     </p:extLst>
   </p:cSld>
@@ -2188,15 +2188,15 @@
         </p:nvSpPr>
         <p:spPr>
           <a:xfrm>
-            <a:off x="839789" y="287972"/>
-            <a:ext cx="3932237" cy="1007904"/>
+            <a:off x="839789" y="240030"/>
+            <a:ext cx="3932237" cy="840105"/>
           </a:xfrm>
         </p:spPr>
         <p:txBody>
           <a:bodyPr anchor="b"/>
           <a:lstStyle>
             <a:lvl1pPr>
-              <a:defRPr sz="2016"/>
+              <a:defRPr sz="1680"/>
             </a:lvl1pPr>
           </a:lstStyle>
           <a:p>
@@ -2220,8 +2220,8 @@
         </p:nvSpPr>
         <p:spPr>
           <a:xfrm>
-            <a:off x="5183188" y="621941"/>
-            <a:ext cx="6172200" cy="3069707"/>
+            <a:off x="5183188" y="518398"/>
+            <a:ext cx="6172200" cy="2558653"/>
           </a:xfrm>
         </p:spPr>
         <p:txBody>
@@ -2229,39 +2229,39 @@
           <a:lstStyle>
             <a:lvl1pPr marL="0" indent="0">
               <a:buNone/>
-              <a:defRPr sz="2016"/>
+              <a:defRPr sz="1680"/>
             </a:lvl1pPr>
-            <a:lvl2pPr marL="287990" indent="0">
-              <a:buNone/>
-              <a:defRPr sz="1764"/>
+            <a:lvl2pPr marL="240030" indent="0">
+              <a:buNone/>
+              <a:defRPr sz="1470"/>
             </a:lvl2pPr>
-            <a:lvl3pPr marL="575981" indent="0">
-              <a:buNone/>
-              <a:defRPr sz="1512"/>
+            <a:lvl3pPr marL="480060" indent="0">
+              <a:buNone/>
+              <a:defRPr sz="1260"/>
             </a:lvl3pPr>
-            <a:lvl4pPr marL="863971" indent="0">
-              <a:buNone/>
-              <a:defRPr sz="1260"/>
+            <a:lvl4pPr marL="720090" indent="0">
+              <a:buNone/>
+              <a:defRPr sz="1050"/>
             </a:lvl4pPr>
-            <a:lvl5pPr marL="1151961" indent="0">
-              <a:buNone/>
-              <a:defRPr sz="1260"/>
+            <a:lvl5pPr marL="960120" indent="0">
+              <a:buNone/>
+              <a:defRPr sz="1050"/>
             </a:lvl5pPr>
-            <a:lvl6pPr marL="1439951" indent="0">
-              <a:buNone/>
-              <a:defRPr sz="1260"/>
+            <a:lvl6pPr marL="1200150" indent="0">
+              <a:buNone/>
+              <a:defRPr sz="1050"/>
             </a:lvl6pPr>
-            <a:lvl7pPr marL="1727942" indent="0">
-              <a:buNone/>
-              <a:defRPr sz="1260"/>
+            <a:lvl7pPr marL="1440180" indent="0">
+              <a:buNone/>
+              <a:defRPr sz="1050"/>
             </a:lvl7pPr>
-            <a:lvl8pPr marL="2015932" indent="0">
-              <a:buNone/>
-              <a:defRPr sz="1260"/>
+            <a:lvl8pPr marL="1680210" indent="0">
+              <a:buNone/>
+              <a:defRPr sz="1050"/>
             </a:lvl8pPr>
-            <a:lvl9pPr marL="2303922" indent="0">
-              <a:buNone/>
-              <a:defRPr sz="1260"/>
+            <a:lvl9pPr marL="1920240" indent="0">
+              <a:buNone/>
+              <a:defRPr sz="1050"/>
             </a:lvl9pPr>
           </a:lstStyle>
           <a:p>
@@ -2285,8 +2285,8 @@
         </p:nvSpPr>
         <p:spPr>
           <a:xfrm>
-            <a:off x="839789" y="1295877"/>
-            <a:ext cx="3932237" cy="2400771"/>
+            <a:off x="839789" y="1080135"/>
+            <a:ext cx="3932237" cy="2001084"/>
           </a:xfrm>
         </p:spPr>
         <p:txBody>
@@ -2294,39 +2294,39 @@
           <a:lstStyle>
             <a:lvl1pPr marL="0" indent="0">
               <a:buNone/>
-              <a:defRPr sz="1008"/>
+              <a:defRPr sz="840"/>
             </a:lvl1pPr>
-            <a:lvl2pPr marL="287990" indent="0">
-              <a:buNone/>
-              <a:defRPr sz="882"/>
+            <a:lvl2pPr marL="240030" indent="0">
+              <a:buNone/>
+              <a:defRPr sz="735"/>
             </a:lvl2pPr>
-            <a:lvl3pPr marL="575981" indent="0">
-              <a:buNone/>
-              <a:defRPr sz="756"/>
+            <a:lvl3pPr marL="480060" indent="0">
+              <a:buNone/>
+              <a:defRPr sz="630"/>
             </a:lvl3pPr>
-            <a:lvl4pPr marL="863971" indent="0">
-              <a:buNone/>
-              <a:defRPr sz="630"/>
+            <a:lvl4pPr marL="720090" indent="0">
+              <a:buNone/>
+              <a:defRPr sz="525"/>
             </a:lvl4pPr>
-            <a:lvl5pPr marL="1151961" indent="0">
-              <a:buNone/>
-              <a:defRPr sz="630"/>
+            <a:lvl5pPr marL="960120" indent="0">
+              <a:buNone/>
+              <a:defRPr sz="525"/>
             </a:lvl5pPr>
-            <a:lvl6pPr marL="1439951" indent="0">
-              <a:buNone/>
-              <a:defRPr sz="630"/>
+            <a:lvl6pPr marL="1200150" indent="0">
+              <a:buNone/>
+              <a:defRPr sz="525"/>
             </a:lvl6pPr>
-            <a:lvl7pPr marL="1727942" indent="0">
-              <a:buNone/>
-              <a:defRPr sz="630"/>
+            <a:lvl7pPr marL="1440180" indent="0">
+              <a:buNone/>
+              <a:defRPr sz="525"/>
             </a:lvl7pPr>
-            <a:lvl8pPr marL="2015932" indent="0">
-              <a:buNone/>
-              <a:defRPr sz="630"/>
+            <a:lvl8pPr marL="1680210" indent="0">
+              <a:buNone/>
+              <a:defRPr sz="525"/>
             </a:lvl8pPr>
-            <a:lvl9pPr marL="2303922" indent="0">
-              <a:buNone/>
-              <a:defRPr sz="630"/>
+            <a:lvl9pPr marL="1920240" indent="0">
+              <a:buNone/>
+              <a:defRPr sz="525"/>
             </a:lvl9pPr>
           </a:lstStyle>
           <a:p>
@@ -2355,7 +2355,7 @@
           <a:p>
             <a:fld id="{BBBC932A-8CEB-449A-B6E3-A107DE752909}" type="datetimeFigureOut">
               <a:rPr lang="zh-TW" altLang="en-US" smtClean="0"/>
-              <a:t>2026/3/19</a:t>
+              <a:t>2026/4/20</a:t>
             </a:fld>
             <a:endParaRPr lang="zh-TW" altLang="en-US"/>
           </a:p>
@@ -2406,7 +2406,7 @@
     </p:spTree>
     <p:extLst>
       <p:ext uri="{BB962C8B-B14F-4D97-AF65-F5344CB8AC3E}">
-        <p14:creationId xmlns:p14="http://schemas.microsoft.com/office/powerpoint/2010/main" val="3202494432"/>
+        <p14:creationId xmlns:p14="http://schemas.microsoft.com/office/powerpoint/2010/main" val="563502838"/>
       </p:ext>
     </p:extLst>
   </p:cSld>
@@ -2450,8 +2450,8 @@
         </p:nvSpPr>
         <p:spPr>
           <a:xfrm>
-            <a:off x="838200" y="229978"/>
-            <a:ext cx="10515600" cy="834921"/>
+            <a:off x="838200" y="191691"/>
+            <a:ext cx="10515600" cy="695921"/>
           </a:xfrm>
           <a:prstGeom prst="rect">
             <a:avLst/>
@@ -2483,8 +2483,8 @@
         </p:nvSpPr>
         <p:spPr>
           <a:xfrm>
-            <a:off x="838200" y="1149890"/>
-            <a:ext cx="10515600" cy="2740739"/>
+            <a:off x="838200" y="958453"/>
+            <a:ext cx="10515600" cy="2284452"/>
           </a:xfrm>
           <a:prstGeom prst="rect">
             <a:avLst/>
@@ -2545,8 +2545,8 @@
         </p:nvSpPr>
         <p:spPr>
           <a:xfrm>
-            <a:off x="838200" y="4003618"/>
-            <a:ext cx="2743200" cy="229978"/>
+            <a:off x="838200" y="3337084"/>
+            <a:ext cx="2743200" cy="191691"/>
           </a:xfrm>
           <a:prstGeom prst="rect">
             <a:avLst/>
@@ -2556,7 +2556,7 @@
           <a:bodyPr vert="horz" lIns="91440" tIns="45720" rIns="91440" bIns="45720" rtlCol="0" anchor="ctr"/>
           <a:lstStyle>
             <a:lvl1pPr algn="l">
-              <a:defRPr sz="756">
+              <a:defRPr sz="630">
                 <a:solidFill>
                   <a:schemeClr val="tx1">
                     <a:tint val="75000"/>
@@ -2568,7 +2568,7 @@
           <a:p>
             <a:fld id="{BBBC932A-8CEB-449A-B6E3-A107DE752909}" type="datetimeFigureOut">
               <a:rPr lang="zh-TW" altLang="en-US" smtClean="0"/>
-              <a:t>2026/3/19</a:t>
+              <a:t>2026/4/20</a:t>
             </a:fld>
             <a:endParaRPr lang="zh-TW" altLang="en-US"/>
           </a:p>
@@ -2586,8 +2586,8 @@
         </p:nvSpPr>
         <p:spPr>
           <a:xfrm>
-            <a:off x="4038600" y="4003618"/>
-            <a:ext cx="4114800" cy="229978"/>
+            <a:off x="4038600" y="3337084"/>
+            <a:ext cx="4114800" cy="191691"/>
           </a:xfrm>
           <a:prstGeom prst="rect">
             <a:avLst/>
@@ -2597,7 +2597,7 @@
           <a:bodyPr vert="horz" lIns="91440" tIns="45720" rIns="91440" bIns="45720" rtlCol="0" anchor="ctr"/>
           <a:lstStyle>
             <a:lvl1pPr algn="ctr">
-              <a:defRPr sz="756">
+              <a:defRPr sz="630">
                 <a:solidFill>
                   <a:schemeClr val="tx1">
                     <a:tint val="75000"/>
@@ -2623,8 +2623,8 @@
         </p:nvSpPr>
         <p:spPr>
           <a:xfrm>
-            <a:off x="8610600" y="4003618"/>
-            <a:ext cx="2743200" cy="229978"/>
+            <a:off x="8610600" y="3337084"/>
+            <a:ext cx="2743200" cy="191691"/>
           </a:xfrm>
           <a:prstGeom prst="rect">
             <a:avLst/>
@@ -2634,7 +2634,7 @@
           <a:bodyPr vert="horz" lIns="91440" tIns="45720" rIns="91440" bIns="45720" rtlCol="0" anchor="ctr"/>
           <a:lstStyle>
             <a:lvl1pPr algn="r">
-              <a:defRPr sz="756">
+              <a:defRPr sz="630">
                 <a:solidFill>
                   <a:schemeClr val="tx1">
                     <a:tint val="75000"/>
@@ -2655,27 +2655,27 @@
     </p:spTree>
     <p:extLst>
       <p:ext uri="{BB962C8B-B14F-4D97-AF65-F5344CB8AC3E}">
-        <p14:creationId xmlns:p14="http://schemas.microsoft.com/office/powerpoint/2010/main" val="814598160"/>
+        <p14:creationId xmlns:p14="http://schemas.microsoft.com/office/powerpoint/2010/main" val="2466603503"/>
       </p:ext>
     </p:extLst>
   </p:cSld>
   <p:clrMap bg1="lt1" tx1="dk1" bg2="lt2" tx2="dk2" accent1="accent1" accent2="accent2" accent3="accent3" accent4="accent4" accent5="accent5" accent6="accent6" hlink="hlink" folHlink="folHlink"/>
   <p:sldLayoutIdLst>
-    <p:sldLayoutId id="2147483673" r:id="rId1"/>
-    <p:sldLayoutId id="2147483674" r:id="rId2"/>
-    <p:sldLayoutId id="2147483675" r:id="rId3"/>
-    <p:sldLayoutId id="2147483676" r:id="rId4"/>
-    <p:sldLayoutId id="2147483677" r:id="rId5"/>
-    <p:sldLayoutId id="2147483678" r:id="rId6"/>
-    <p:sldLayoutId id="2147483679" r:id="rId7"/>
-    <p:sldLayoutId id="2147483680" r:id="rId8"/>
-    <p:sldLayoutId id="2147483681" r:id="rId9"/>
-    <p:sldLayoutId id="2147483682" r:id="rId10"/>
-    <p:sldLayoutId id="2147483683" r:id="rId11"/>
+    <p:sldLayoutId id="2147483697" r:id="rId1"/>
+    <p:sldLayoutId id="2147483698" r:id="rId2"/>
+    <p:sldLayoutId id="2147483699" r:id="rId3"/>
+    <p:sldLayoutId id="2147483700" r:id="rId4"/>
+    <p:sldLayoutId id="2147483701" r:id="rId5"/>
+    <p:sldLayoutId id="2147483702" r:id="rId6"/>
+    <p:sldLayoutId id="2147483703" r:id="rId7"/>
+    <p:sldLayoutId id="2147483704" r:id="rId8"/>
+    <p:sldLayoutId id="2147483705" r:id="rId9"/>
+    <p:sldLayoutId id="2147483706" r:id="rId10"/>
+    <p:sldLayoutId id="2147483707" r:id="rId11"/>
   </p:sldLayoutIdLst>
   <p:txStyles>
     <p:titleStyle>
-      <a:lvl1pPr algn="l" defTabSz="575981" rtl="0" eaLnBrk="1" latinLnBrk="0" hangingPunct="1">
+      <a:lvl1pPr algn="l" defTabSz="480060" rtl="0" eaLnBrk="1" latinLnBrk="0" hangingPunct="1">
         <a:lnSpc>
           <a:spcPct val="90000"/>
         </a:lnSpc>
@@ -2683,7 +2683,7 @@
           <a:spcPct val="0"/>
         </a:spcBef>
         <a:buNone/>
-        <a:defRPr sz="2772" kern="1200">
+        <a:defRPr sz="2310" kern="1200">
           <a:solidFill>
             <a:schemeClr val="tx1"/>
           </a:solidFill>
@@ -2694,16 +2694,16 @@
       </a:lvl1pPr>
     </p:titleStyle>
     <p:bodyStyle>
-      <a:lvl1pPr marL="143995" indent="-143995" algn="l" defTabSz="575981" rtl="0" eaLnBrk="1" latinLnBrk="0" hangingPunct="1">
+      <a:lvl1pPr marL="120015" indent="-120015" algn="l" defTabSz="480060" rtl="0" eaLnBrk="1" latinLnBrk="0" hangingPunct="1">
         <a:lnSpc>
           <a:spcPct val="90000"/>
         </a:lnSpc>
         <a:spcBef>
-          <a:spcPts val="630"/>
+          <a:spcPts val="525"/>
         </a:spcBef>
         <a:buFont typeface="Arial" panose="020B0604020202020204" pitchFamily="34" charset="0"/>
         <a:buChar char="•"/>
-        <a:defRPr sz="1764" kern="1200">
+        <a:defRPr sz="1470" kern="1200">
           <a:solidFill>
             <a:schemeClr val="tx1"/>
           </a:solidFill>
@@ -2712,30 +2712,12 @@
           <a:cs typeface="+mn-cs"/>
         </a:defRPr>
       </a:lvl1pPr>
-      <a:lvl2pPr marL="431985" indent="-143995" algn="l" defTabSz="575981" rtl="0" eaLnBrk="1" latinLnBrk="0" hangingPunct="1">
+      <a:lvl2pPr marL="360045" indent="-120015" algn="l" defTabSz="480060" rtl="0" eaLnBrk="1" latinLnBrk="0" hangingPunct="1">
         <a:lnSpc>
           <a:spcPct val="90000"/>
         </a:lnSpc>
         <a:spcBef>
-          <a:spcPts val="315"/>
-        </a:spcBef>
-        <a:buFont typeface="Arial" panose="020B0604020202020204" pitchFamily="34" charset="0"/>
-        <a:buChar char="•"/>
-        <a:defRPr sz="1512" kern="1200">
-          <a:solidFill>
-            <a:schemeClr val="tx1"/>
-          </a:solidFill>
-          <a:latin typeface="+mn-lt"/>
-          <a:ea typeface="+mn-ea"/>
-          <a:cs typeface="+mn-cs"/>
-        </a:defRPr>
-      </a:lvl2pPr>
-      <a:lvl3pPr marL="719976" indent="-143995" algn="l" defTabSz="575981" rtl="0" eaLnBrk="1" latinLnBrk="0" hangingPunct="1">
-        <a:lnSpc>
-          <a:spcPct val="90000"/>
-        </a:lnSpc>
-        <a:spcBef>
-          <a:spcPts val="315"/>
+          <a:spcPts val="263"/>
         </a:spcBef>
         <a:buFont typeface="Arial" panose="020B0604020202020204" pitchFamily="34" charset="0"/>
         <a:buChar char="•"/>
@@ -2747,17 +2729,35 @@
           <a:ea typeface="+mn-ea"/>
           <a:cs typeface="+mn-cs"/>
         </a:defRPr>
-      </a:lvl3pPr>
-      <a:lvl4pPr marL="1007966" indent="-143995" algn="l" defTabSz="575981" rtl="0" eaLnBrk="1" latinLnBrk="0" hangingPunct="1">
+      </a:lvl2pPr>
+      <a:lvl3pPr marL="600075" indent="-120015" algn="l" defTabSz="480060" rtl="0" eaLnBrk="1" latinLnBrk="0" hangingPunct="1">
         <a:lnSpc>
           <a:spcPct val="90000"/>
         </a:lnSpc>
         <a:spcBef>
-          <a:spcPts val="315"/>
+          <a:spcPts val="263"/>
         </a:spcBef>
         <a:buFont typeface="Arial" panose="020B0604020202020204" pitchFamily="34" charset="0"/>
         <a:buChar char="•"/>
-        <a:defRPr sz="1134" kern="1200">
+        <a:defRPr sz="1050" kern="1200">
+          <a:solidFill>
+            <a:schemeClr val="tx1"/>
+          </a:solidFill>
+          <a:latin typeface="+mn-lt"/>
+          <a:ea typeface="+mn-ea"/>
+          <a:cs typeface="+mn-cs"/>
+        </a:defRPr>
+      </a:lvl3pPr>
+      <a:lvl4pPr marL="840105" indent="-120015" algn="l" defTabSz="480060" rtl="0" eaLnBrk="1" latinLnBrk="0" hangingPunct="1">
+        <a:lnSpc>
+          <a:spcPct val="90000"/>
+        </a:lnSpc>
+        <a:spcBef>
+          <a:spcPts val="263"/>
+        </a:spcBef>
+        <a:buFont typeface="Arial" panose="020B0604020202020204" pitchFamily="34" charset="0"/>
+        <a:buChar char="•"/>
+        <a:defRPr sz="945" kern="1200">
           <a:solidFill>
             <a:schemeClr val="tx1"/>
           </a:solidFill>
@@ -2766,16 +2766,16 @@
           <a:cs typeface="+mn-cs"/>
         </a:defRPr>
       </a:lvl4pPr>
-      <a:lvl5pPr marL="1295956" indent="-143995" algn="l" defTabSz="575981" rtl="0" eaLnBrk="1" latinLnBrk="0" hangingPunct="1">
+      <a:lvl5pPr marL="1080135" indent="-120015" algn="l" defTabSz="480060" rtl="0" eaLnBrk="1" latinLnBrk="0" hangingPunct="1">
         <a:lnSpc>
           <a:spcPct val="90000"/>
         </a:lnSpc>
         <a:spcBef>
-          <a:spcPts val="315"/>
+          <a:spcPts val="263"/>
         </a:spcBef>
         <a:buFont typeface="Arial" panose="020B0604020202020204" pitchFamily="34" charset="0"/>
         <a:buChar char="•"/>
-        <a:defRPr sz="1134" kern="1200">
+        <a:defRPr sz="945" kern="1200">
           <a:solidFill>
             <a:schemeClr val="tx1"/>
           </a:solidFill>
@@ -2784,16 +2784,16 @@
           <a:cs typeface="+mn-cs"/>
         </a:defRPr>
       </a:lvl5pPr>
-      <a:lvl6pPr marL="1583947" indent="-143995" algn="l" defTabSz="575981" rtl="0" eaLnBrk="1" latinLnBrk="0" hangingPunct="1">
+      <a:lvl6pPr marL="1320165" indent="-120015" algn="l" defTabSz="480060" rtl="0" eaLnBrk="1" latinLnBrk="0" hangingPunct="1">
         <a:lnSpc>
           <a:spcPct val="90000"/>
         </a:lnSpc>
         <a:spcBef>
-          <a:spcPts val="315"/>
+          <a:spcPts val="263"/>
         </a:spcBef>
         <a:buFont typeface="Arial" panose="020B0604020202020204" pitchFamily="34" charset="0"/>
         <a:buChar char="•"/>
-        <a:defRPr sz="1134" kern="1200">
+        <a:defRPr sz="945" kern="1200">
           <a:solidFill>
             <a:schemeClr val="tx1"/>
           </a:solidFill>
@@ -2802,16 +2802,16 @@
           <a:cs typeface="+mn-cs"/>
         </a:defRPr>
       </a:lvl6pPr>
-      <a:lvl7pPr marL="1871937" indent="-143995" algn="l" defTabSz="575981" rtl="0" eaLnBrk="1" latinLnBrk="0" hangingPunct="1">
+      <a:lvl7pPr marL="1560195" indent="-120015" algn="l" defTabSz="480060" rtl="0" eaLnBrk="1" latinLnBrk="0" hangingPunct="1">
         <a:lnSpc>
           <a:spcPct val="90000"/>
         </a:lnSpc>
         <a:spcBef>
-          <a:spcPts val="315"/>
+          <a:spcPts val="263"/>
         </a:spcBef>
         <a:buFont typeface="Arial" panose="020B0604020202020204" pitchFamily="34" charset="0"/>
         <a:buChar char="•"/>
-        <a:defRPr sz="1134" kern="1200">
+        <a:defRPr sz="945" kern="1200">
           <a:solidFill>
             <a:schemeClr val="tx1"/>
           </a:solidFill>
@@ -2820,16 +2820,16 @@
           <a:cs typeface="+mn-cs"/>
         </a:defRPr>
       </a:lvl7pPr>
-      <a:lvl8pPr marL="2159927" indent="-143995" algn="l" defTabSz="575981" rtl="0" eaLnBrk="1" latinLnBrk="0" hangingPunct="1">
+      <a:lvl8pPr marL="1800225" indent="-120015" algn="l" defTabSz="480060" rtl="0" eaLnBrk="1" latinLnBrk="0" hangingPunct="1">
         <a:lnSpc>
           <a:spcPct val="90000"/>
         </a:lnSpc>
         <a:spcBef>
-          <a:spcPts val="315"/>
+          <a:spcPts val="263"/>
         </a:spcBef>
         <a:buFont typeface="Arial" panose="020B0604020202020204" pitchFamily="34" charset="0"/>
         <a:buChar char="•"/>
-        <a:defRPr sz="1134" kern="1200">
+        <a:defRPr sz="945" kern="1200">
           <a:solidFill>
             <a:schemeClr val="tx1"/>
           </a:solidFill>
@@ -2838,16 +2838,16 @@
           <a:cs typeface="+mn-cs"/>
         </a:defRPr>
       </a:lvl8pPr>
-      <a:lvl9pPr marL="2447917" indent="-143995" algn="l" defTabSz="575981" rtl="0" eaLnBrk="1" latinLnBrk="0" hangingPunct="1">
+      <a:lvl9pPr marL="2040255" indent="-120015" algn="l" defTabSz="480060" rtl="0" eaLnBrk="1" latinLnBrk="0" hangingPunct="1">
         <a:lnSpc>
           <a:spcPct val="90000"/>
         </a:lnSpc>
         <a:spcBef>
-          <a:spcPts val="315"/>
+          <a:spcPts val="263"/>
         </a:spcBef>
         <a:buFont typeface="Arial" panose="020B0604020202020204" pitchFamily="34" charset="0"/>
         <a:buChar char="•"/>
-        <a:defRPr sz="1134" kern="1200">
+        <a:defRPr sz="945" kern="1200">
           <a:solidFill>
             <a:schemeClr val="tx1"/>
           </a:solidFill>
@@ -2861,8 +2861,8 @@
       <a:defPPr>
         <a:defRPr lang="en-US"/>
       </a:defPPr>
-      <a:lvl1pPr marL="0" algn="l" defTabSz="575981" rtl="0" eaLnBrk="1" latinLnBrk="0" hangingPunct="1">
-        <a:defRPr sz="1134" kern="1200">
+      <a:lvl1pPr marL="0" algn="l" defTabSz="480060" rtl="0" eaLnBrk="1" latinLnBrk="0" hangingPunct="1">
+        <a:defRPr sz="945" kern="1200">
           <a:solidFill>
             <a:schemeClr val="tx1"/>
           </a:solidFill>
@@ -2871,8 +2871,8 @@
           <a:cs typeface="+mn-cs"/>
         </a:defRPr>
       </a:lvl1pPr>
-      <a:lvl2pPr marL="287990" algn="l" defTabSz="575981" rtl="0" eaLnBrk="1" latinLnBrk="0" hangingPunct="1">
-        <a:defRPr sz="1134" kern="1200">
+      <a:lvl2pPr marL="240030" algn="l" defTabSz="480060" rtl="0" eaLnBrk="1" latinLnBrk="0" hangingPunct="1">
+        <a:defRPr sz="945" kern="1200">
           <a:solidFill>
             <a:schemeClr val="tx1"/>
           </a:solidFill>
@@ -2881,8 +2881,8 @@
           <a:cs typeface="+mn-cs"/>
         </a:defRPr>
       </a:lvl2pPr>
-      <a:lvl3pPr marL="575981" algn="l" defTabSz="575981" rtl="0" eaLnBrk="1" latinLnBrk="0" hangingPunct="1">
-        <a:defRPr sz="1134" kern="1200">
+      <a:lvl3pPr marL="480060" algn="l" defTabSz="480060" rtl="0" eaLnBrk="1" latinLnBrk="0" hangingPunct="1">
+        <a:defRPr sz="945" kern="1200">
           <a:solidFill>
             <a:schemeClr val="tx1"/>
           </a:solidFill>
@@ -2891,8 +2891,8 @@
           <a:cs typeface="+mn-cs"/>
         </a:defRPr>
       </a:lvl3pPr>
-      <a:lvl4pPr marL="863971" algn="l" defTabSz="575981" rtl="0" eaLnBrk="1" latinLnBrk="0" hangingPunct="1">
-        <a:defRPr sz="1134" kern="1200">
+      <a:lvl4pPr marL="720090" algn="l" defTabSz="480060" rtl="0" eaLnBrk="1" latinLnBrk="0" hangingPunct="1">
+        <a:defRPr sz="945" kern="1200">
           <a:solidFill>
             <a:schemeClr val="tx1"/>
           </a:solidFill>
@@ -2901,8 +2901,8 @@
           <a:cs typeface="+mn-cs"/>
         </a:defRPr>
       </a:lvl4pPr>
-      <a:lvl5pPr marL="1151961" algn="l" defTabSz="575981" rtl="0" eaLnBrk="1" latinLnBrk="0" hangingPunct="1">
-        <a:defRPr sz="1134" kern="1200">
+      <a:lvl5pPr marL="960120" algn="l" defTabSz="480060" rtl="0" eaLnBrk="1" latinLnBrk="0" hangingPunct="1">
+        <a:defRPr sz="945" kern="1200">
           <a:solidFill>
             <a:schemeClr val="tx1"/>
           </a:solidFill>
@@ -2911,8 +2911,8 @@
           <a:cs typeface="+mn-cs"/>
         </a:defRPr>
       </a:lvl5pPr>
-      <a:lvl6pPr marL="1439951" algn="l" defTabSz="575981" rtl="0" eaLnBrk="1" latinLnBrk="0" hangingPunct="1">
-        <a:defRPr sz="1134" kern="1200">
+      <a:lvl6pPr marL="1200150" algn="l" defTabSz="480060" rtl="0" eaLnBrk="1" latinLnBrk="0" hangingPunct="1">
+        <a:defRPr sz="945" kern="1200">
           <a:solidFill>
             <a:schemeClr val="tx1"/>
           </a:solidFill>
@@ -2921,8 +2921,8 @@
           <a:cs typeface="+mn-cs"/>
         </a:defRPr>
       </a:lvl6pPr>
-      <a:lvl7pPr marL="1727942" algn="l" defTabSz="575981" rtl="0" eaLnBrk="1" latinLnBrk="0" hangingPunct="1">
-        <a:defRPr sz="1134" kern="1200">
+      <a:lvl7pPr marL="1440180" algn="l" defTabSz="480060" rtl="0" eaLnBrk="1" latinLnBrk="0" hangingPunct="1">
+        <a:defRPr sz="945" kern="1200">
           <a:solidFill>
             <a:schemeClr val="tx1"/>
           </a:solidFill>
@@ -2931,8 +2931,8 @@
           <a:cs typeface="+mn-cs"/>
         </a:defRPr>
       </a:lvl7pPr>
-      <a:lvl8pPr marL="2015932" algn="l" defTabSz="575981" rtl="0" eaLnBrk="1" latinLnBrk="0" hangingPunct="1">
-        <a:defRPr sz="1134" kern="1200">
+      <a:lvl8pPr marL="1680210" algn="l" defTabSz="480060" rtl="0" eaLnBrk="1" latinLnBrk="0" hangingPunct="1">
+        <a:defRPr sz="945" kern="1200">
           <a:solidFill>
             <a:schemeClr val="tx1"/>
           </a:solidFill>
@@ -2941,8 +2941,8 @@
           <a:cs typeface="+mn-cs"/>
         </a:defRPr>
       </a:lvl8pPr>
-      <a:lvl9pPr marL="2303922" algn="l" defTabSz="575981" rtl="0" eaLnBrk="1" latinLnBrk="0" hangingPunct="1">
-        <a:defRPr sz="1134" kern="1200">
+      <a:lvl9pPr marL="1920240" algn="l" defTabSz="480060" rtl="0" eaLnBrk="1" latinLnBrk="0" hangingPunct="1">
+        <a:defRPr sz="945" kern="1200">
           <a:solidFill>
             <a:schemeClr val="tx1"/>
           </a:solidFill>
@@ -2987,7 +2987,7 @@
         </p:nvGrpSpPr>
         <p:grpSpPr>
           <a:xfrm>
-            <a:off x="104775" y="287093"/>
+            <a:off x="104775" y="-72476"/>
             <a:ext cx="11982450" cy="3745402"/>
             <a:chOff x="114300" y="-109233"/>
             <a:chExt cx="11982450" cy="3745402"/>
@@ -3341,7 +3341,7 @@
           </p:nvSpPr>
           <p:spPr>
             <a:xfrm>
-              <a:off x="114300" y="-109233"/>
+              <a:off x="114300" y="41080"/>
               <a:ext cx="742950" cy="369332"/>
             </a:xfrm>
             <a:prstGeom prst="rect">
@@ -3383,7 +3383,7 @@
           </p:nvSpPr>
           <p:spPr>
             <a:xfrm>
-              <a:off x="2645721" y="-109233"/>
+              <a:off x="2645721" y="41080"/>
               <a:ext cx="742950" cy="369332"/>
             </a:xfrm>
             <a:prstGeom prst="rect">
@@ -3425,7 +3425,7 @@
           </p:nvSpPr>
           <p:spPr>
             <a:xfrm>
-              <a:off x="5387227" y="-109233"/>
+              <a:off x="5387227" y="41080"/>
               <a:ext cx="742950" cy="369332"/>
             </a:xfrm>
             <a:prstGeom prst="rect">

--- a/Final/Figures/SAM_OAM.pptx
+++ b/Final/Figures/SAM_OAM.pptx
@@ -6,6 +6,7 @@
   </p:sldMasterIdLst>
   <p:sldIdLst>
     <p:sldId id="256" r:id="rId2"/>
+    <p:sldId id="257" r:id="rId3"/>
   </p:sldIdLst>
   <p:sldSz cx="12192000" cy="3600450"/>
   <p:notesSz cx="6858000" cy="9144000"/>
@@ -243,7 +244,7 @@
           <a:p>
             <a:fld id="{BBBC932A-8CEB-449A-B6E3-A107DE752909}" type="datetimeFigureOut">
               <a:rPr lang="zh-TW" altLang="en-US" smtClean="0"/>
-              <a:t>2026/4/20</a:t>
+              <a:t>2026/7/5</a:t>
             </a:fld>
             <a:endParaRPr lang="zh-TW" altLang="en-US"/>
           </a:p>
@@ -413,7 +414,7 @@
           <a:p>
             <a:fld id="{BBBC932A-8CEB-449A-B6E3-A107DE752909}" type="datetimeFigureOut">
               <a:rPr lang="zh-TW" altLang="en-US" smtClean="0"/>
-              <a:t>2026/4/20</a:t>
+              <a:t>2026/7/5</a:t>
             </a:fld>
             <a:endParaRPr lang="zh-TW" altLang="en-US"/>
           </a:p>
@@ -593,7 +594,7 @@
           <a:p>
             <a:fld id="{BBBC932A-8CEB-449A-B6E3-A107DE752909}" type="datetimeFigureOut">
               <a:rPr lang="zh-TW" altLang="en-US" smtClean="0"/>
-              <a:t>2026/4/20</a:t>
+              <a:t>2026/7/5</a:t>
             </a:fld>
             <a:endParaRPr lang="zh-TW" altLang="en-US"/>
           </a:p>
@@ -763,7 +764,7 @@
           <a:p>
             <a:fld id="{BBBC932A-8CEB-449A-B6E3-A107DE752909}" type="datetimeFigureOut">
               <a:rPr lang="zh-TW" altLang="en-US" smtClean="0"/>
-              <a:t>2026/4/20</a:t>
+              <a:t>2026/7/5</a:t>
             </a:fld>
             <a:endParaRPr lang="zh-TW" altLang="en-US"/>
           </a:p>
@@ -1009,7 +1010,7 @@
           <a:p>
             <a:fld id="{BBBC932A-8CEB-449A-B6E3-A107DE752909}" type="datetimeFigureOut">
               <a:rPr lang="zh-TW" altLang="en-US" smtClean="0"/>
-              <a:t>2026/4/20</a:t>
+              <a:t>2026/7/5</a:t>
             </a:fld>
             <a:endParaRPr lang="zh-TW" altLang="en-US"/>
           </a:p>
@@ -1241,7 +1242,7 @@
           <a:p>
             <a:fld id="{BBBC932A-8CEB-449A-B6E3-A107DE752909}" type="datetimeFigureOut">
               <a:rPr lang="zh-TW" altLang="en-US" smtClean="0"/>
-              <a:t>2026/4/20</a:t>
+              <a:t>2026/7/5</a:t>
             </a:fld>
             <a:endParaRPr lang="zh-TW" altLang="en-US"/>
           </a:p>
@@ -1608,7 +1609,7 @@
           <a:p>
             <a:fld id="{BBBC932A-8CEB-449A-B6E3-A107DE752909}" type="datetimeFigureOut">
               <a:rPr lang="zh-TW" altLang="en-US" smtClean="0"/>
-              <a:t>2026/4/20</a:t>
+              <a:t>2026/7/5</a:t>
             </a:fld>
             <a:endParaRPr lang="zh-TW" altLang="en-US"/>
           </a:p>
@@ -1726,7 +1727,7 @@
           <a:p>
             <a:fld id="{BBBC932A-8CEB-449A-B6E3-A107DE752909}" type="datetimeFigureOut">
               <a:rPr lang="zh-TW" altLang="en-US" smtClean="0"/>
-              <a:t>2026/4/20</a:t>
+              <a:t>2026/7/5</a:t>
             </a:fld>
             <a:endParaRPr lang="zh-TW" altLang="en-US"/>
           </a:p>
@@ -1821,7 +1822,7 @@
           <a:p>
             <a:fld id="{BBBC932A-8CEB-449A-B6E3-A107DE752909}" type="datetimeFigureOut">
               <a:rPr lang="zh-TW" altLang="en-US" smtClean="0"/>
-              <a:t>2026/4/20</a:t>
+              <a:t>2026/7/5</a:t>
             </a:fld>
             <a:endParaRPr lang="zh-TW" altLang="en-US"/>
           </a:p>
@@ -2098,7 +2099,7 @@
           <a:p>
             <a:fld id="{BBBC932A-8CEB-449A-B6E3-A107DE752909}" type="datetimeFigureOut">
               <a:rPr lang="zh-TW" altLang="en-US" smtClean="0"/>
-              <a:t>2026/4/20</a:t>
+              <a:t>2026/7/5</a:t>
             </a:fld>
             <a:endParaRPr lang="zh-TW" altLang="en-US"/>
           </a:p>
@@ -2355,7 +2356,7 @@
           <a:p>
             <a:fld id="{BBBC932A-8CEB-449A-B6E3-A107DE752909}" type="datetimeFigureOut">
               <a:rPr lang="zh-TW" altLang="en-US" smtClean="0"/>
-              <a:t>2026/4/20</a:t>
+              <a:t>2026/7/5</a:t>
             </a:fld>
             <a:endParaRPr lang="zh-TW" altLang="en-US"/>
           </a:p>
@@ -2568,7 +2569,7 @@
           <a:p>
             <a:fld id="{BBBC932A-8CEB-449A-B6E3-A107DE752909}" type="datetimeFigureOut">
               <a:rPr lang="zh-TW" altLang="en-US" smtClean="0"/>
-              <a:t>2026/4/20</a:t>
+              <a:t>2026/7/5</a:t>
             </a:fld>
             <a:endParaRPr lang="zh-TW" altLang="en-US"/>
           </a:p>
@@ -3467,6 +3468,391 @@
 </p:sld>
 </file>
 
+<file path=ppt/slides/slide2.xml><?xml version="1.0" encoding="utf-8"?>
+<p:sld xmlns:a="http://schemas.openxmlformats.org/drawingml/2006/main" xmlns:r="http://schemas.openxmlformats.org/officeDocument/2006/relationships" xmlns:p="http://schemas.openxmlformats.org/presentationml/2006/main" show="0">
+  <p:cSld>
+    <p:spTree>
+      <p:nvGrpSpPr>
+        <p:cNvPr id="1" name=""/>
+        <p:cNvGrpSpPr/>
+        <p:nvPr/>
+      </p:nvGrpSpPr>
+      <p:grpSpPr>
+        <a:xfrm>
+          <a:off x="0" y="0"/>
+          <a:ext cx="0" cy="0"/>
+          <a:chOff x="0" y="0"/>
+          <a:chExt cx="0" cy="0"/>
+        </a:xfrm>
+      </p:grpSpPr>
+      <p:grpSp>
+        <p:nvGrpSpPr>
+          <p:cNvPr id="2" name="群組 1">
+            <a:extLst>
+              <a:ext uri="{FF2B5EF4-FFF2-40B4-BE49-F238E27FC236}">
+                <a16:creationId xmlns:a16="http://schemas.microsoft.com/office/drawing/2014/main" id="{A376D91E-E84A-4420-B61F-05CDF524A90A}"/>
+              </a:ext>
+            </a:extLst>
+          </p:cNvPr>
+          <p:cNvGrpSpPr/>
+          <p:nvPr/>
+        </p:nvGrpSpPr>
+        <p:grpSpPr>
+          <a:xfrm>
+            <a:off x="104775" y="-72476"/>
+            <a:ext cx="11982450" cy="3745402"/>
+            <a:chOff x="114300" y="-109233"/>
+            <a:chExt cx="11982450" cy="3745402"/>
+          </a:xfrm>
+        </p:grpSpPr>
+        <p:sp>
+          <p:nvSpPr>
+            <p:cNvPr id="14" name="矩形 13">
+              <a:extLst>
+                <a:ext uri="{FF2B5EF4-FFF2-40B4-BE49-F238E27FC236}">
+                  <a16:creationId xmlns:a16="http://schemas.microsoft.com/office/drawing/2014/main" id="{CF1A9890-1AA3-405F-9850-A680699D75B3}"/>
+                </a:ext>
+              </a:extLst>
+            </p:cNvPr>
+            <p:cNvSpPr/>
+            <p:nvPr/>
+          </p:nvSpPr>
+          <p:spPr>
+            <a:xfrm>
+              <a:off x="114300" y="-109233"/>
+              <a:ext cx="11982450" cy="3745402"/>
+            </a:xfrm>
+            <a:prstGeom prst="rect">
+              <a:avLst/>
+            </a:prstGeom>
+            <a:solidFill>
+              <a:schemeClr val="bg1"/>
+            </a:solidFill>
+            <a:ln>
+              <a:noFill/>
+            </a:ln>
+          </p:spPr>
+          <p:style>
+            <a:lnRef idx="2">
+              <a:schemeClr val="accent1">
+                <a:shade val="50000"/>
+              </a:schemeClr>
+            </a:lnRef>
+            <a:fillRef idx="1">
+              <a:schemeClr val="accent1"/>
+            </a:fillRef>
+            <a:effectRef idx="0">
+              <a:schemeClr val="accent1"/>
+            </a:effectRef>
+            <a:fontRef idx="minor">
+              <a:schemeClr val="lt1"/>
+            </a:fontRef>
+          </p:style>
+          <p:txBody>
+            <a:bodyPr rot="0" spcFirstLastPara="0" vertOverflow="overflow" horzOverflow="overflow" vert="horz" wrap="square" lIns="91440" tIns="45720" rIns="91440" bIns="45720" numCol="1" spcCol="0" rtlCol="0" fromWordArt="0" anchor="ctr" anchorCtr="0" forceAA="0" compatLnSpc="1">
+              <a:prstTxWarp prst="textNoShape">
+                <a:avLst/>
+              </a:prstTxWarp>
+              <a:noAutofit/>
+            </a:bodyPr>
+            <a:lstStyle/>
+            <a:p>
+              <a:pPr algn="ctr"/>
+              <a:endParaRPr lang="zh-TW" altLang="en-US"/>
+            </a:p>
+          </p:txBody>
+        </p:sp>
+        <p:pic>
+          <p:nvPicPr>
+            <p:cNvPr id="4" name="圖片 3">
+              <a:extLst>
+                <a:ext uri="{FF2B5EF4-FFF2-40B4-BE49-F238E27FC236}">
+                  <a16:creationId xmlns:a16="http://schemas.microsoft.com/office/drawing/2014/main" id="{770C264F-8F9A-4168-B0DD-38C3666F56CE}"/>
+                </a:ext>
+              </a:extLst>
+            </p:cNvPr>
+            <p:cNvPicPr>
+              <a:picLocks noChangeAspect="1"/>
+            </p:cNvPicPr>
+            <p:nvPr/>
+          </p:nvPicPr>
+          <p:blipFill>
+            <a:blip r:embed="rId2">
+              <a:clrChange>
+                <a:clrFrom>
+                  <a:srgbClr val="FFFFFF"/>
+                </a:clrFrom>
+                <a:clrTo>
+                  <a:srgbClr val="FFFFFF">
+                    <a:alpha val="0"/>
+                  </a:srgbClr>
+                </a:clrTo>
+              </a:clrChange>
+            </a:blip>
+            <a:stretch>
+              <a:fillRect/>
+            </a:stretch>
+          </p:blipFill>
+          <p:spPr>
+            <a:xfrm>
+              <a:off x="5587254" y="459417"/>
+              <a:ext cx="6475001" cy="2859840"/>
+            </a:xfrm>
+            <a:prstGeom prst="rect">
+              <a:avLst/>
+            </a:prstGeom>
+          </p:spPr>
+        </p:pic>
+        <p:grpSp>
+          <p:nvGrpSpPr>
+            <p:cNvPr id="8" name="群組 7">
+              <a:extLst>
+                <a:ext uri="{FF2B5EF4-FFF2-40B4-BE49-F238E27FC236}">
+                  <a16:creationId xmlns:a16="http://schemas.microsoft.com/office/drawing/2014/main" id="{21C659D2-52F7-42D5-9082-8D7CCABD6188}"/>
+                </a:ext>
+              </a:extLst>
+            </p:cNvPr>
+            <p:cNvGrpSpPr/>
+            <p:nvPr/>
+          </p:nvGrpSpPr>
+          <p:grpSpPr>
+            <a:xfrm>
+              <a:off x="2886075" y="219042"/>
+              <a:ext cx="2114550" cy="3340590"/>
+              <a:chOff x="2714625" y="2116566"/>
+              <a:chExt cx="1760243" cy="2780852"/>
+            </a:xfrm>
+          </p:grpSpPr>
+          <p:pic>
+            <p:nvPicPr>
+              <p:cNvPr id="6" name="圖片 5">
+                <a:extLst>
+                  <a:ext uri="{FF2B5EF4-FFF2-40B4-BE49-F238E27FC236}">
+                    <a16:creationId xmlns:a16="http://schemas.microsoft.com/office/drawing/2014/main" id="{FE80220D-2EA1-41DE-B38C-CC10733FDEF7}"/>
+                  </a:ext>
+                </a:extLst>
+              </p:cNvPr>
+              <p:cNvPicPr>
+                <a:picLocks noChangeAspect="1"/>
+              </p:cNvPicPr>
+              <p:nvPr/>
+            </p:nvPicPr>
+            <p:blipFill rotWithShape="1">
+              <a:blip r:embed="rId3">
+                <a:clrChange>
+                  <a:clrFrom>
+                    <a:srgbClr val="FFFFFF"/>
+                  </a:clrFrom>
+                  <a:clrTo>
+                    <a:srgbClr val="FFFFFF">
+                      <a:alpha val="0"/>
+                    </a:srgbClr>
+                  </a:clrTo>
+                </a:clrChange>
+              </a:blip>
+              <a:srcRect l="54820"/>
+              <a:stretch/>
+            </p:blipFill>
+            <p:spPr>
+              <a:xfrm>
+                <a:off x="2714625" y="2116566"/>
+                <a:ext cx="1760243" cy="2780852"/>
+              </a:xfrm>
+              <a:prstGeom prst="rect">
+                <a:avLst/>
+              </a:prstGeom>
+            </p:spPr>
+          </p:pic>
+          <p:sp>
+            <p:nvSpPr>
+              <p:cNvPr id="7" name="矩形 6">
+                <a:extLst>
+                  <a:ext uri="{FF2B5EF4-FFF2-40B4-BE49-F238E27FC236}">
+                    <a16:creationId xmlns:a16="http://schemas.microsoft.com/office/drawing/2014/main" id="{2C708C0B-0A48-4F5D-9652-0D6908A84EE0}"/>
+                  </a:ext>
+                </a:extLst>
+              </p:cNvPr>
+              <p:cNvSpPr/>
+              <p:nvPr/>
+            </p:nvSpPr>
+            <p:spPr>
+              <a:xfrm>
+                <a:off x="2773680" y="2125980"/>
+                <a:ext cx="289560" cy="228600"/>
+              </a:xfrm>
+              <a:prstGeom prst="rect">
+                <a:avLst/>
+              </a:prstGeom>
+              <a:solidFill>
+                <a:schemeClr val="bg1"/>
+              </a:solidFill>
+              <a:ln>
+                <a:noFill/>
+              </a:ln>
+            </p:spPr>
+            <p:style>
+              <a:lnRef idx="2">
+                <a:schemeClr val="accent1">
+                  <a:shade val="50000"/>
+                </a:schemeClr>
+              </a:lnRef>
+              <a:fillRef idx="1">
+                <a:schemeClr val="accent1"/>
+              </a:fillRef>
+              <a:effectRef idx="0">
+                <a:schemeClr val="accent1"/>
+              </a:effectRef>
+              <a:fontRef idx="minor">
+                <a:schemeClr val="lt1"/>
+              </a:fontRef>
+            </p:style>
+            <p:txBody>
+              <a:bodyPr rot="0" spcFirstLastPara="0" vertOverflow="overflow" horzOverflow="overflow" vert="horz" wrap="square" lIns="91440" tIns="45720" rIns="91440" bIns="45720" numCol="1" spcCol="0" rtlCol="0" fromWordArt="0" anchor="ctr" anchorCtr="0" forceAA="0" compatLnSpc="1">
+                <a:prstTxWarp prst="textNoShape">
+                  <a:avLst/>
+                </a:prstTxWarp>
+                <a:noAutofit/>
+              </a:bodyPr>
+              <a:lstStyle/>
+              <a:p>
+                <a:pPr algn="ctr"/>
+                <a:endParaRPr lang="zh-TW" altLang="en-US" dirty="0"/>
+              </a:p>
+            </p:txBody>
+          </p:sp>
+        </p:grpSp>
+        <p:grpSp>
+          <p:nvGrpSpPr>
+            <p:cNvPr id="10" name="群組 9">
+              <a:extLst>
+                <a:ext uri="{FF2B5EF4-FFF2-40B4-BE49-F238E27FC236}">
+                  <a16:creationId xmlns:a16="http://schemas.microsoft.com/office/drawing/2014/main" id="{81C5B797-FB48-49E9-BEB9-96C762ADDF25}"/>
+                </a:ext>
+              </a:extLst>
+            </p:cNvPr>
+            <p:cNvGrpSpPr/>
+            <p:nvPr/>
+          </p:nvGrpSpPr>
+          <p:grpSpPr>
+            <a:xfrm>
+              <a:off x="306521" y="219042"/>
+              <a:ext cx="2137631" cy="3340590"/>
+              <a:chOff x="306519" y="1979406"/>
+              <a:chExt cx="1779457" cy="2780852"/>
+            </a:xfrm>
+          </p:grpSpPr>
+          <p:pic>
+            <p:nvPicPr>
+              <p:cNvPr id="5" name="圖片 4">
+                <a:extLst>
+                  <a:ext uri="{FF2B5EF4-FFF2-40B4-BE49-F238E27FC236}">
+                    <a16:creationId xmlns:a16="http://schemas.microsoft.com/office/drawing/2014/main" id="{CF2CAE5E-C970-4C78-9692-062E2A2632E4}"/>
+                  </a:ext>
+                </a:extLst>
+              </p:cNvPr>
+              <p:cNvPicPr>
+                <a:picLocks noChangeAspect="1"/>
+              </p:cNvPicPr>
+              <p:nvPr/>
+            </p:nvPicPr>
+            <p:blipFill rotWithShape="1">
+              <a:blip r:embed="rId3">
+                <a:clrChange>
+                  <a:clrFrom>
+                    <a:srgbClr val="FFFFFF"/>
+                  </a:clrFrom>
+                  <a:clrTo>
+                    <a:srgbClr val="FFFFFF">
+                      <a:alpha val="0"/>
+                    </a:srgbClr>
+                  </a:clrTo>
+                </a:clrChange>
+              </a:blip>
+              <a:srcRect r="54767"/>
+              <a:stretch/>
+            </p:blipFill>
+            <p:spPr>
+              <a:xfrm>
+                <a:off x="323664" y="1979406"/>
+                <a:ext cx="1762312" cy="2780852"/>
+              </a:xfrm>
+              <a:prstGeom prst="rect">
+                <a:avLst/>
+              </a:prstGeom>
+            </p:spPr>
+          </p:pic>
+          <p:sp>
+            <p:nvSpPr>
+              <p:cNvPr id="9" name="矩形 8">
+                <a:extLst>
+                  <a:ext uri="{FF2B5EF4-FFF2-40B4-BE49-F238E27FC236}">
+                    <a16:creationId xmlns:a16="http://schemas.microsoft.com/office/drawing/2014/main" id="{CD7CE6A4-B03A-4769-92BD-D767532EA641}"/>
+                  </a:ext>
+                </a:extLst>
+              </p:cNvPr>
+              <p:cNvSpPr/>
+              <p:nvPr/>
+            </p:nvSpPr>
+            <p:spPr>
+              <a:xfrm>
+                <a:off x="306519" y="2011680"/>
+                <a:ext cx="289560" cy="228600"/>
+              </a:xfrm>
+              <a:prstGeom prst="rect">
+                <a:avLst/>
+              </a:prstGeom>
+              <a:solidFill>
+                <a:schemeClr val="bg1"/>
+              </a:solidFill>
+              <a:ln>
+                <a:noFill/>
+              </a:ln>
+            </p:spPr>
+            <p:style>
+              <a:lnRef idx="2">
+                <a:schemeClr val="accent1">
+                  <a:shade val="50000"/>
+                </a:schemeClr>
+              </a:lnRef>
+              <a:fillRef idx="1">
+                <a:schemeClr val="accent1"/>
+              </a:fillRef>
+              <a:effectRef idx="0">
+                <a:schemeClr val="accent1"/>
+              </a:effectRef>
+              <a:fontRef idx="minor">
+                <a:schemeClr val="lt1"/>
+              </a:fontRef>
+            </p:style>
+            <p:txBody>
+              <a:bodyPr rot="0" spcFirstLastPara="0" vertOverflow="overflow" horzOverflow="overflow" vert="horz" wrap="square" lIns="91440" tIns="45720" rIns="91440" bIns="45720" numCol="1" spcCol="0" rtlCol="0" fromWordArt="0" anchor="ctr" anchorCtr="0" forceAA="0" compatLnSpc="1">
+                <a:prstTxWarp prst="textNoShape">
+                  <a:avLst/>
+                </a:prstTxWarp>
+                <a:noAutofit/>
+              </a:bodyPr>
+              <a:lstStyle/>
+              <a:p>
+                <a:pPr algn="ctr"/>
+                <a:endParaRPr lang="zh-TW" altLang="en-US" dirty="0"/>
+              </a:p>
+            </p:txBody>
+          </p:sp>
+        </p:grpSp>
+      </p:grpSp>
+    </p:spTree>
+    <p:extLst>
+      <p:ext uri="{BB962C8B-B14F-4D97-AF65-F5344CB8AC3E}">
+        <p14:creationId xmlns:p14="http://schemas.microsoft.com/office/powerpoint/2010/main" val="1849621459"/>
+      </p:ext>
+    </p:extLst>
+  </p:cSld>
+  <p:clrMapOvr>
+    <a:masterClrMapping/>
+  </p:clrMapOvr>
+</p:sld>
+</file>
+
 <file path=ppt/theme/theme1.xml><?xml version="1.0" encoding="utf-8"?>
 <a:theme xmlns:a="http://schemas.openxmlformats.org/drawingml/2006/main" name="Office 佈景主題">
   <a:themeElements>
